--- a/Topic_E/Exam_Practice/TE-L02_Writing_Workshop_Multilingual_Life_and_Communication.pptx
+++ b/Topic_E/Exam_Practice/TE-L02_Writing_Workshop_Multilingual_Life_and_Communication.pptx
@@ -784,7 +784,11 @@
           <a:lstStyle/>
           <a:p>
             <a:r>
-              <a:rPr lang="en-US" dirty="0"/>
+              <a:rPr lang="ar-SA" dirty="0">
+                <a:latin typeface="Amiri" pitchFamily="2" charset="-78"/>
+                <a:ea typeface="Amiri" pitchFamily="2" charset="-78"/>
+                <a:cs typeface="Amiri" pitchFamily="2" charset="-78"/>
+              </a:rPr>
               <a:t>Q3 (3 min to choose and read). Title (أ) suits Core and Develop; title (ب) suits Stretch.</a:t>
             </a:r>
             <a:endParaRPr lang="en-US" dirty="0"/>
@@ -1403,7 +1407,11 @@
           <a:lstStyle/>
           <a:p>
             <a:r>
-              <a:rPr lang="en-US" dirty="0"/>
+              <a:rPr lang="ar-SA" dirty="0">
+                <a:latin typeface="Amiri" pitchFamily="2" charset="-78"/>
+                <a:ea typeface="Amiri" pitchFamily="2" charset="-78"/>
+                <a:cs typeface="Amiri" pitchFamily="2" charset="-78"/>
+              </a:rPr>
               <a:t>WELCOME (1 min) — while students join.
 • Greet each student by name as they arrive: السَّلَامُ عَلَيْكُمْ. Take the register (Pastoral Tracker: attendance 0/1).
 • 2-MINUTE CHECK-IN (SEND training): a private chat to any student who seemed unsettled last lesson — “Are you okay today? 👍 / 👎”.
@@ -1672,7 +1680,11 @@
           <a:lstStyle/>
           <a:p>
             <a:r>
-              <a:rPr lang="en-US" dirty="0"/>
+              <a:rPr lang="ar-SA" dirty="0">
+                <a:latin typeface="Amiri" pitchFamily="2" charset="-78"/>
+                <a:ea typeface="Amiri" pitchFamily="2" charset="-78"/>
+                <a:cs typeface="Amiri" pitchFamily="2" charset="-78"/>
+              </a:rPr>
               <a:t>QUESTION 1 — FORM FILLING. About 8 minutes. Core: boxes 1–6. Develop / Stretch: all 8. Box 3 and 4 headings contain relative clauses — point out allatī + returning pronoun (-hā). A boy writes مُبْتَدِئٌ in box 5.</a:t>
             </a:r>
             <a:endParaRPr lang="en-US" dirty="0"/>
@@ -1936,7 +1948,11 @@
           <a:lstStyle/>
           <a:p>
             <a:r>
-              <a:rPr lang="en-US" dirty="0"/>
+              <a:rPr lang="ar-SA" dirty="0">
+                <a:latin typeface="Amiri" pitchFamily="2" charset="-78"/>
+                <a:ea typeface="Amiri" pitchFamily="2" charset="-78"/>
+                <a:cs typeface="Amiri" pitchFamily="2" charset="-78"/>
+              </a:rPr>
               <a:t>Question words: مَنْ (who) · كَيْفَ (how) · كَمْ مَرَّةً (how often) · تَتَوَاصَلَانِ (you two communicate — dual) · خِطَطُكِ (plans — FUTURE).</a:t>
             </a:r>
             <a:endParaRPr lang="en-US" dirty="0"/>
@@ -2508,6 +2524,7 @@
                   <a:srgbClr val="D4AF37"/>
                 </a:solidFill>
                 <a:latin typeface="Amiri" pitchFamily="2" charset="-78"/>
+                <a:ea typeface="Amiri" pitchFamily="2" charset="-78"/>
                 <a:cs typeface="Amiri" pitchFamily="2" charset="-78"/>
               </a:rPr>
               <a:t>م</a:t>
@@ -2714,6 +2731,7 @@
                   <a:srgbClr val="D4AF37"/>
                 </a:solidFill>
                 <a:latin typeface="Amiri" pitchFamily="2" charset="-78"/>
+                <a:ea typeface="Amiri" pitchFamily="2" charset="-78"/>
                 <a:cs typeface="Amiri" pitchFamily="2" charset="-78"/>
               </a:rPr>
               <a:t>وَرْشَةُ الكِتَابَةِ — الحَيَاةُ بِلُغَاتٍ مُتَعَدِّدَةٍ</a:t>
@@ -3171,6 +3189,7 @@
                   <a:srgbClr val="D4AF37"/>
                 </a:solidFill>
                 <a:latin typeface="Amiri" pitchFamily="2" charset="-78"/>
+                <a:ea typeface="Amiri" pitchFamily="2" charset="-78"/>
                 <a:cs typeface="Amiri" pitchFamily="2" charset="-78"/>
               </a:rPr>
               <a:t>م</a:t>
@@ -3491,6 +3510,7 @@
                   <a:srgbClr val="8A6D1E"/>
                 </a:solidFill>
                 <a:latin typeface="Amiri" pitchFamily="2" charset="-78"/>
+                <a:ea typeface="Amiri" pitchFamily="2" charset="-78"/>
                 <a:cs typeface="Amiri" pitchFamily="2" charset="-78"/>
               </a:rPr>
               <a:t>نَمُوذَجُ الإِجَابَةِ</a:t>
@@ -3604,6 +3624,7 @@
                   <a:srgbClr val="1F2A37"/>
                 </a:solidFill>
                 <a:latin typeface="Amiri" pitchFamily="2" charset="-78"/>
+                <a:ea typeface="Amiri" pitchFamily="2" charset="-78"/>
                 <a:cs typeface="Amiri" pitchFamily="2" charset="-78"/>
               </a:rPr>
               <a:t>مَرْحَبًا يَا نُورُ،</a:t>
@@ -3623,6 +3644,7 @@
                   <a:srgbClr val="1F2A37"/>
                 </a:solidFill>
                 <a:latin typeface="Amiri" pitchFamily="2" charset="-78"/>
+                <a:ea typeface="Amiri" pitchFamily="2" charset="-78"/>
                 <a:cs typeface="Amiri" pitchFamily="2" charset="-78"/>
               </a:rPr>
               <a:t>كَيْفَ حَالُكِ؟ عِنْدِي خَبَرٌ جَمِيلٌ! بَدَأْتُ تَبَادُلًا لُغَوِيًّا عَلَى الإِنْتَرْنِتِ مَعَ بِنْتٍ اسْمُهَا لِينَا. لِينَا أُرْدُنِيَّةٌ، وَتَسْكُنُ فِي عَمَّانَ. نَتَوَاصَلُ بِمُكَالَمَةِ فِيدْيُو مَرَّتَيْنِ فِي الأُسْبُوعِ. أَوَّلًا نَتَكَلَّمُ بِالعَرَبِيَّةِ نِصْفَ سَاعَةٍ، ثُمَّ بِالإِنْجْلِيزِيَّةِ نِصْفَ سَاعَةٍ. هِيَ تُصَحِّحُ نُطْقِي، وَأَنَا أُسَاعِدُهَا فِي القَوَاعِدِ. تَعَلُّمُ اللُّغَةِ بِهٰذِهِ الطَّرِيقَةِ مُمْتِعٌ جِدًّا، لِأَنِّي أَتَكَلَّمُ مَعَ شَخْصٍ حَقِيقِيٍّ. فِي الصَّيْفِ سَأَزُورُ الأُرْدُنَّ، وَسَأُقَابِلُ لِينَا إِنْ شَاءَ اللّٰهُ. وَأَنْتِ، هَلْ تُرِيدِينَ صَدِيقَةً لِلتَّبَادُلِ أَيْضًا؟</a:t>
@@ -3642,6 +3664,7 @@
                   <a:srgbClr val="1F2A37"/>
                 </a:solidFill>
                 <a:latin typeface="Amiri" pitchFamily="2" charset="-78"/>
+                <a:ea typeface="Amiri" pitchFamily="2" charset="-78"/>
                 <a:cs typeface="Amiri" pitchFamily="2" charset="-78"/>
               </a:rPr>
               <a:t>مَعَ السَّلَامَةِ،</a:t>
@@ -3661,6 +3684,7 @@
                   <a:srgbClr val="1F2A37"/>
                 </a:solidFill>
                 <a:latin typeface="Amiri" pitchFamily="2" charset="-78"/>
+                <a:ea typeface="Amiri" pitchFamily="2" charset="-78"/>
                 <a:cs typeface="Amiri" pitchFamily="2" charset="-78"/>
               </a:rPr>
               <a:t>سَلْمَى</a:t>
@@ -3824,11 +3848,12 @@
               <a:buNone/>
             </a:pPr>
             <a:r>
-              <a:rPr lang="en-US" sz="950" b="1" dirty="0">
+              <a:rPr lang="ar-SA" sz="950" b="1" dirty="0">
                 <a:solidFill>
                   <a:srgbClr val="FFFFFF"/>
                 </a:solidFill>
                 <a:latin typeface="Calibri" pitchFamily="34" charset="0"/>
+                <a:ea typeface="Amiri" pitchFamily="2" charset="-78"/>
                 <a:cs typeface="Amiri" pitchFamily="2" charset="-78"/>
               </a:rPr>
               <a:t>تَبَادُلًا لُغَوِيًّا</a:t>
@@ -3889,11 +3914,12 @@
               <a:buNone/>
             </a:pPr>
             <a:r>
-              <a:rPr lang="en-US" sz="950" b="1" dirty="0">
+              <a:rPr lang="ar-SA" sz="950" b="1" dirty="0">
                 <a:solidFill>
                   <a:srgbClr val="FFFFFF"/>
                 </a:solidFill>
                 <a:latin typeface="Calibri" pitchFamily="34" charset="0"/>
+                <a:ea typeface="Amiri" pitchFamily="2" charset="-78"/>
                 <a:cs typeface="Amiri" pitchFamily="2" charset="-78"/>
               </a:rPr>
               <a:t>نَتَوَاصَلُ بِمُكَالَمَةِ فِيدْيُو</a:t>
@@ -3954,11 +3980,12 @@
               <a:buNone/>
             </a:pPr>
             <a:r>
-              <a:rPr lang="en-US" sz="950" b="1" dirty="0">
+              <a:rPr lang="ar-SA" sz="950" b="1" dirty="0">
                 <a:solidFill>
                   <a:srgbClr val="FFFFFF"/>
                 </a:solidFill>
                 <a:latin typeface="Calibri" pitchFamily="34" charset="0"/>
+                <a:ea typeface="Amiri" pitchFamily="2" charset="-78"/>
                 <a:cs typeface="Amiri" pitchFamily="2" charset="-78"/>
               </a:rPr>
               <a:t>تَعَلُّمُ اللُّغَةِ</a:t>
@@ -4019,11 +4046,12 @@
               <a:buNone/>
             </a:pPr>
             <a:r>
-              <a:rPr lang="en-US" sz="950" b="1" dirty="0">
+              <a:rPr lang="ar-SA" sz="950" b="1" dirty="0">
                 <a:solidFill>
                   <a:srgbClr val="FFFFFF"/>
                 </a:solidFill>
                 <a:latin typeface="Calibri" pitchFamily="34" charset="0"/>
+                <a:ea typeface="Amiri" pitchFamily="2" charset="-78"/>
                 <a:cs typeface="Amiri" pitchFamily="2" charset="-78"/>
               </a:rPr>
               <a:t>سَأَزُورُ الأُرْدُنَّ</a:t>
@@ -4157,6 +4185,7 @@
                   <a:srgbClr val="D4AF37"/>
                 </a:solidFill>
                 <a:latin typeface="Amiri" pitchFamily="2" charset="-78"/>
+                <a:ea typeface="Amiri" pitchFamily="2" charset="-78"/>
                 <a:cs typeface="Amiri" pitchFamily="2" charset="-78"/>
               </a:rPr>
               <a:t>م</a:t>
@@ -4477,6 +4506,7 @@
                   <a:srgbClr val="8A6D1E"/>
                 </a:solidFill>
                 <a:latin typeface="Amiri" pitchFamily="2" charset="-78"/>
+                <a:ea typeface="Amiri" pitchFamily="2" charset="-78"/>
                 <a:cs typeface="Amiri" pitchFamily="2" charset="-78"/>
               </a:rPr>
               <a:t>نَمُوذَجُ الإِجَابَةِ</a:t>
@@ -4590,6 +4620,7 @@
                   <a:srgbClr val="1F2A37"/>
                 </a:solidFill>
                 <a:latin typeface="Amiri" pitchFamily="2" charset="-78"/>
+                <a:ea typeface="Amiri" pitchFamily="2" charset="-78"/>
                 <a:cs typeface="Amiri" pitchFamily="2" charset="-78"/>
               </a:rPr>
               <a:t>عَزِيزَتِي نُورُ،</a:t>
@@ -4609,6 +4640,7 @@
                   <a:srgbClr val="1F2A37"/>
                 </a:solidFill>
                 <a:latin typeface="Amiri" pitchFamily="2" charset="-78"/>
+                <a:ea typeface="Amiri" pitchFamily="2" charset="-78"/>
                 <a:cs typeface="Amiri" pitchFamily="2" charset="-78"/>
               </a:rPr>
               <a:t>أَكْتُبُ إِلَيْكِ لِأُخْبِرَكِ بِتَجْرِبَةٍ غَيَّرَتْ طَرِيقَةَ تَعَلُّمِي! فَقَدْ بَدَأْتُ تَبَادُلًا لُغَوِيًّا مَعَ لِينَا، وَهِيَ طَالِبَةٌ أُرْدُنِيَّةٌ تَدْرُسُ الطِّبَّ فِي عَمَّانَ وَتُرِيدُ أَنْ تُحَسِّنَ لُغَتَهَا الإِنْجْلِيزِيَّةَ. نَتَوَاصَلُ مَرَّتَيْنِ فِي الأُسْبُوعِ بِالفِيدْيُو، فَنَتَحَدَّثُ نِصْفَ السَّاعَةِ الأُولَى بِالعَرَبِيَّةِ، وَالثَّانِيَةَ بِالإِنْجْلِيزِيَّةِ. أَكْثَرُ مَا يُعْجِبُنِي أَنَّ لِينَا تُعَلِّمُنِي عِبَارَاتٍ لَا تُوجَدُ فِي الكُتُبِ، وَتَشْرَحُ لِي الفَرْقَ بَيْنَ لَهْجَتِهَا وَالفُصْحَى. صَحِيحٌ أَنَّنِي أَخْجَلُ أَحْيَانًا مِنْ أَخْطَائِي، غَيْرَ أَنَّهَا صَبُورَةٌ جِدًّا. وَإِذَا اسْتَمْرَرْنَا هٰكَذَا، فَسَأَتَكَلَّمُ بِطَلَاقَةٍ قَبْلَ الامْتِحَانِ. هَلْ تُرِيدِينَ أَنْ أُعَرِّفَكِ بِصَدِيقَةٍ لَهَا؟</a:t>
@@ -4628,6 +4660,7 @@
                   <a:srgbClr val="1F2A37"/>
                 </a:solidFill>
                 <a:latin typeface="Amiri" pitchFamily="2" charset="-78"/>
+                <a:ea typeface="Amiri" pitchFamily="2" charset="-78"/>
                 <a:cs typeface="Amiri" pitchFamily="2" charset="-78"/>
               </a:rPr>
               <a:t>بِمَحَبَّةٍ،</a:t>
@@ -4647,6 +4680,7 @@
                   <a:srgbClr val="1F2A37"/>
                 </a:solidFill>
                 <a:latin typeface="Amiri" pitchFamily="2" charset="-78"/>
+                <a:ea typeface="Amiri" pitchFamily="2" charset="-78"/>
                 <a:cs typeface="Amiri" pitchFamily="2" charset="-78"/>
               </a:rPr>
               <a:t>سَلْمَى</a:t>
@@ -4810,11 +4844,12 @@
               <a:buNone/>
             </a:pPr>
             <a:r>
-              <a:rPr lang="en-US" sz="950" b="1" dirty="0">
+              <a:rPr lang="ar-SA" sz="950" b="1" dirty="0">
                 <a:solidFill>
                   <a:srgbClr val="FFFFFF"/>
                 </a:solidFill>
                 <a:latin typeface="Calibri" pitchFamily="34" charset="0"/>
+                <a:ea typeface="Amiri" pitchFamily="2" charset="-78"/>
                 <a:cs typeface="Amiri" pitchFamily="2" charset="-78"/>
               </a:rPr>
               <a:t>تَجْرِبَةٍ غَيَّرَتْ</a:t>
@@ -4875,11 +4910,12 @@
               <a:buNone/>
             </a:pPr>
             <a:r>
-              <a:rPr lang="en-US" sz="950" b="1" dirty="0">
+              <a:rPr lang="ar-SA" sz="950" b="1" dirty="0">
                 <a:solidFill>
                   <a:srgbClr val="FFFFFF"/>
                 </a:solidFill>
                 <a:latin typeface="Calibri" pitchFamily="34" charset="0"/>
+                <a:ea typeface="Amiri" pitchFamily="2" charset="-78"/>
                 <a:cs typeface="Amiri" pitchFamily="2" charset="-78"/>
               </a:rPr>
               <a:t>طَالِبَةٌ أُرْدُنِيَّةٌ تَدْرُسُ</a:t>
@@ -4940,11 +4976,12 @@
               <a:buNone/>
             </a:pPr>
             <a:r>
-              <a:rPr lang="en-US" sz="950" b="1" dirty="0">
+              <a:rPr lang="ar-SA" sz="950" b="1" dirty="0">
                 <a:solidFill>
                   <a:srgbClr val="FFFFFF"/>
                 </a:solidFill>
                 <a:latin typeface="Calibri" pitchFamily="34" charset="0"/>
+                <a:ea typeface="Amiri" pitchFamily="2" charset="-78"/>
                 <a:cs typeface="Amiri" pitchFamily="2" charset="-78"/>
               </a:rPr>
               <a:t>لَا تُوجَدُ فِي الكُتُبِ</a:t>
@@ -5005,11 +5042,12 @@
               <a:buNone/>
             </a:pPr>
             <a:r>
-              <a:rPr lang="en-US" sz="950" b="1" dirty="0">
+              <a:rPr lang="ar-SA" sz="950" b="1" dirty="0">
                 <a:solidFill>
                   <a:srgbClr val="FFFFFF"/>
                 </a:solidFill>
                 <a:latin typeface="Calibri" pitchFamily="34" charset="0"/>
+                <a:ea typeface="Amiri" pitchFamily="2" charset="-78"/>
                 <a:cs typeface="Amiri" pitchFamily="2" charset="-78"/>
               </a:rPr>
               <a:t>إِذَا اسْتَمْرَرْنَا … فَسَأَتَكَلَّمُ</a:t>
@@ -5143,6 +5181,7 @@
                   <a:srgbClr val="D4AF37"/>
                 </a:solidFill>
                 <a:latin typeface="Amiri" pitchFamily="2" charset="-78"/>
+                <a:ea typeface="Amiri" pitchFamily="2" charset="-78"/>
                 <a:cs typeface="Amiri" pitchFamily="2" charset="-78"/>
               </a:rPr>
               <a:t>م</a:t>
@@ -5463,6 +5502,7 @@
                   <a:srgbClr val="8A6D1E"/>
                 </a:solidFill>
                 <a:latin typeface="Amiri" pitchFamily="2" charset="-78"/>
+                <a:ea typeface="Amiri" pitchFamily="2" charset="-78"/>
                 <a:cs typeface="Amiri" pitchFamily="2" charset="-78"/>
               </a:rPr>
               <a:t>اخْتَرْ عُنْوَانًا وَاحِدًا</a:t>
@@ -5743,6 +5783,7 @@
                   <a:srgbClr val="1B3B6F"/>
                 </a:solidFill>
                 <a:latin typeface="Amiri" pitchFamily="2" charset="-78"/>
+                <a:ea typeface="Amiri" pitchFamily="2" charset="-78"/>
                 <a:cs typeface="Amiri" pitchFamily="2" charset="-78"/>
               </a:rPr>
               <a:t>اللُّغَاتُ فِي حَيَاتِي اليَوْمِيَّةِ</a:t>
@@ -5781,6 +5822,7 @@
                   <a:srgbClr val="1B3B6F"/>
                 </a:solidFill>
                 <a:latin typeface="Amiri" pitchFamily="2" charset="-78"/>
+                <a:ea typeface="Amiri" pitchFamily="2" charset="-78"/>
                 <a:cs typeface="Amiri" pitchFamily="2" charset="-78"/>
               </a:rPr>
               <a:t>(أ)</a:t>
@@ -5887,6 +5929,7 @@
                   <a:srgbClr val="1B3B6F"/>
                 </a:solidFill>
                 <a:latin typeface="Amiri" pitchFamily="2" charset="-78"/>
+                <a:ea typeface="Amiri" pitchFamily="2" charset="-78"/>
                 <a:cs typeface="Amiri" pitchFamily="2" charset="-78"/>
               </a:rPr>
               <a:t>اللُّغَاتُ الَّتِي تَتَكَلَّمُهَا وَمَعَ مَنْ · يَوْمُكَ بَيْنَ اللُّغَاتِ · كَيْفَ تَتَعَلَّمُ وَمَا الصُّعُوبَاتُ · رَأْيُكَ وَخُطَطُكَ</a:t>
@@ -6018,6 +6061,7 @@
                   <a:srgbClr val="1B3B6F"/>
                 </a:solidFill>
                 <a:latin typeface="Amiri" pitchFamily="2" charset="-78"/>
+                <a:ea typeface="Amiri" pitchFamily="2" charset="-78"/>
                 <a:cs typeface="Amiri" pitchFamily="2" charset="-78"/>
               </a:rPr>
               <a:t>هَلْ سَتُغْنِينَا التَّرْجَمَةُ الآلِيَّةُ عَنْ تَعَلُّمِ اللُّغَاتِ؟</a:t>
@@ -6056,6 +6100,7 @@
                   <a:srgbClr val="1B3B6F"/>
                 </a:solidFill>
                 <a:latin typeface="Amiri" pitchFamily="2" charset="-78"/>
+                <a:ea typeface="Amiri" pitchFamily="2" charset="-78"/>
                 <a:cs typeface="Amiri" pitchFamily="2" charset="-78"/>
               </a:rPr>
               <a:t>(ب)</a:t>
@@ -6159,6 +6204,7 @@
                   <a:srgbClr val="1B3B6F"/>
                 </a:solidFill>
                 <a:latin typeface="Amiri" pitchFamily="2" charset="-78"/>
+                <a:ea typeface="Amiri" pitchFamily="2" charset="-78"/>
                 <a:cs typeface="Amiri" pitchFamily="2" charset="-78"/>
               </a:rPr>
               <a:t>المَوْضُوعُ · فَوَائِدُ التَّرْجَمَةِ الآلِيَّةِ وَحُدُودُهَا · مِثَالٌ مِنْ تَجْرِبَتِكَ · رَأْيُكَ</a:t>
@@ -6358,6 +6404,7 @@
                   <a:srgbClr val="D4AF37"/>
                 </a:solidFill>
                 <a:latin typeface="Amiri" pitchFamily="2" charset="-78"/>
+                <a:ea typeface="Amiri" pitchFamily="2" charset="-78"/>
                 <a:cs typeface="Amiri" pitchFamily="2" charset="-78"/>
               </a:rPr>
               <a:t>م</a:t>
@@ -6678,6 +6725,7 @@
                   <a:srgbClr val="8A6D1E"/>
                 </a:solidFill>
                 <a:latin typeface="Amiri" pitchFamily="2" charset="-78"/>
+                <a:ea typeface="Amiri" pitchFamily="2" charset="-78"/>
                 <a:cs typeface="Amiri" pitchFamily="2" charset="-78"/>
               </a:rPr>
               <a:t>خُطَّةُ الكِتَابَةِ</a:t>
@@ -7302,6 +7350,7 @@
                   <a:srgbClr val="1B3B6F"/>
                 </a:solidFill>
                 <a:latin typeface="Amiri" pitchFamily="2" charset="-78"/>
+                <a:ea typeface="Amiri" pitchFamily="2" charset="-78"/>
                 <a:cs typeface="Amiri" pitchFamily="2" charset="-78"/>
               </a:rPr>
               <a:t>أَتَّصِلُ بِجَدَّتِي، وَأَتَكَلَّمُ مَعَهَا بِالعَرَبِيَّةِ.</a:t>
@@ -7401,6 +7450,7 @@
                   <a:srgbClr val="1B3B6F"/>
                 </a:solidFill>
                 <a:latin typeface="Amiri" pitchFamily="2" charset="-78"/>
+                <a:ea typeface="Amiri" pitchFamily="2" charset="-78"/>
                 <a:cs typeface="Amiri" pitchFamily="2" charset="-78"/>
               </a:rPr>
               <a:t>الطَّرِيقَةُ الَّتِي تُسَاعِدُنِي هِيَ الكَلَامُ مَعَ النَّاسِ.</a:t>
@@ -7500,6 +7550,7 @@
                   <a:srgbClr val="1B3B6F"/>
                 </a:solidFill>
                 <a:latin typeface="Amiri" pitchFamily="2" charset="-78"/>
+                <a:ea typeface="Amiri" pitchFamily="2" charset="-78"/>
                 <a:cs typeface="Amiri" pitchFamily="2" charset="-78"/>
               </a:rPr>
               <a:t>سَأَتَعَلَّمُ الفَرَنْسِيَّةَ، لِأَنِّي أُرِيدُ أَنْ أُتَرْجِمَ.</a:t>
@@ -7661,6 +7712,7 @@
                   <a:srgbClr val="1F2A37"/>
                 </a:solidFill>
                 <a:latin typeface="Amiri" pitchFamily="2" charset="-78"/>
+                <a:ea typeface="Amiri" pitchFamily="2" charset="-78"/>
                 <a:cs typeface="Amiri" pitchFamily="2" charset="-78"/>
               </a:rPr>
               <a:t>أ</a:t>
@@ -7687,6 +7739,7 @@
                   <a:srgbClr val="1F2A37"/>
                 </a:solidFill>
                 <a:latin typeface="Amiri" pitchFamily="2" charset="-78"/>
+                <a:ea typeface="Amiri" pitchFamily="2" charset="-78"/>
                 <a:cs typeface="Amiri" pitchFamily="2" charset="-78"/>
               </a:rPr>
               <a:t>ب</a:t>
@@ -7833,6 +7886,7 @@
                   <a:srgbClr val="D4AF37"/>
                 </a:solidFill>
                 <a:latin typeface="Amiri" pitchFamily="2" charset="-78"/>
+                <a:ea typeface="Amiri" pitchFamily="2" charset="-78"/>
                 <a:cs typeface="Amiri" pitchFamily="2" charset="-78"/>
               </a:rPr>
               <a:t>م</a:t>
@@ -8090,6 +8144,7 @@
                   <a:srgbClr val="8A6D1E"/>
                 </a:solidFill>
                 <a:latin typeface="Amiri" pitchFamily="2" charset="-78"/>
+                <a:ea typeface="Amiri" pitchFamily="2" charset="-78"/>
                 <a:cs typeface="Amiri" pitchFamily="2" charset="-78"/>
               </a:rPr>
               <a:t>أ</a:t>
@@ -8154,6 +8209,7 @@
                   <a:srgbClr val="1B3B6F"/>
                 </a:solidFill>
                 <a:latin typeface="Amiri" pitchFamily="2" charset="-78"/>
+                <a:ea typeface="Amiri" pitchFamily="2" charset="-78"/>
                 <a:cs typeface="Amiri" pitchFamily="2" charset="-78"/>
               </a:rPr>
               <a:t>أ</a:t>
@@ -8205,6 +8261,7 @@
                   <a:srgbClr val="8A6D1E"/>
                 </a:solidFill>
                 <a:latin typeface="Amiri" pitchFamily="2" charset="-78"/>
+                <a:ea typeface="Amiri" pitchFamily="2" charset="-78"/>
                 <a:cs typeface="Amiri" pitchFamily="2" charset="-78"/>
               </a:rPr>
               <a:t>نَمُوذَجُ الإِجَابَةِ</a:t>
@@ -8318,6 +8375,7 @@
                   <a:srgbClr val="1F2A37"/>
                 </a:solidFill>
                 <a:latin typeface="Amiri" pitchFamily="2" charset="-78"/>
+                <a:ea typeface="Amiri" pitchFamily="2" charset="-78"/>
                 <a:cs typeface="Amiri" pitchFamily="2" charset="-78"/>
               </a:rPr>
               <a:t>أَنَا سَلْمَى، وَأَعِيشُ فِي لَنْدَنَ. أَبِي سُودَانِيٌّ، وَأُمِّي إِنْجْلِيزِيَّةٌ، لِذٰلِكَ أَتَكَلَّمُ لُغَتَيْنِ مُنْذُ صِغَرِي. فِي البَيْتِ نَتَكَلَّمُ الإِنْجْلِيزِيَّةَ وَالعَرَبِيَّةَ، وَفِي المَدْرَسَةِ أَتَكَلَّمُ الإِنْجْلِيزِيَّةَ فَقَطْ.</a:t>
@@ -8337,6 +8395,7 @@
                   <a:srgbClr val="1F2A37"/>
                 </a:solidFill>
                 <a:latin typeface="Amiri" pitchFamily="2" charset="-78"/>
+                <a:ea typeface="Amiri" pitchFamily="2" charset="-78"/>
                 <a:cs typeface="Amiri" pitchFamily="2" charset="-78"/>
               </a:rPr>
               <a:t>فِي الصَّبَاحِ أَسْمَعُ القُرْآنَ بِالعَرَبِيَّةِ، وَفِي المَسَاءِ أَتَّصِلُ بِجَدَّتِي فِي الخُرْطُومِ عَبْرَ الفِيدْيُو، وَنَتَكَلَّمُ نِصْفَ سَاعَةٍ. جَدَّتِي لَا تَتَكَلَّمُ الإِنْجْلِيزِيَّةَ، لِذٰلِكَ أَتَكَلَّمُ مَعَهَا بِالعَرَبِيَّةِ دَائِمًا. أَحْيَانًا أُتَرْجِمُ لِأُمِّي، لِأَنَّهَا لَا تَفْهَمُ كُلَّ الكَلِمَاتِ العَرَبِيَّةِ، وَأَنَا أُحِبُّ مُسَاعَدَتَهَا.</a:t>
@@ -8356,6 +8415,7 @@
                   <a:srgbClr val="1F2A37"/>
                 </a:solidFill>
                 <a:latin typeface="Amiri" pitchFamily="2" charset="-78"/>
+                <a:ea typeface="Amiri" pitchFamily="2" charset="-78"/>
                 <a:cs typeface="Amiri" pitchFamily="2" charset="-78"/>
               </a:rPr>
               <a:t>أَتَعَلَّمُ الفُصْحَى فِي المَدْرَسَةِ ثَلَاثَ سَاعَاتٍ فِي الأُسْبُوعِ. أَسْتَخْدِمُ تَطْبِيقًا لِلْمُفْرَدَاتِ، وَأُشَاهِدُ مُسَلْسَلًا عَرَبِيًّا مَعَ أُخْتِي. الطَّرِيقَةُ الَّتِي تُسَاعِدُنِي أَكْثَرَ هِيَ الكَلَامُ مَعَ النَّاسِ، لِأَنِّي أَسْمَعُ النُّطْقَ الصَّحِيحَ. أَصْعَبُ شَيْءٍ هُوَ القَوَاعِدُ، وَمَعَ ذٰلِكَ أُحِبُّهَا كَثِيرًا.</a:t>
@@ -8375,6 +8435,7 @@
                   <a:srgbClr val="1F2A37"/>
                 </a:solidFill>
                 <a:latin typeface="Amiri" pitchFamily="2" charset="-78"/>
+                <a:ea typeface="Amiri" pitchFamily="2" charset="-78"/>
                 <a:cs typeface="Amiri" pitchFamily="2" charset="-78"/>
               </a:rPr>
               <a:t>أَرَى أَنَّ تَعَلُّمَ اللُّغَاتِ مُهِمٌّ جِدًّا. فِي المُسْتَقْبَلِ سَأَتَعَلَّمُ الفَرَنْسِيَّةَ أَيْضًا، لِأَنِّي أُرِيدُ أَنْ أَعْمَلَ مُتَرْجِمَةً فِي مُنَظَّمَةٍ دُوَلِيَّةٍ.</a:t>
@@ -8538,11 +8599,12 @@
               <a:buNone/>
             </a:pPr>
             <a:r>
-              <a:rPr lang="en-US" sz="950" b="1" dirty="0">
+              <a:rPr lang="ar-SA" sz="950" b="1" dirty="0">
                 <a:solidFill>
                   <a:srgbClr val="FFFFFF"/>
                 </a:solidFill>
                 <a:latin typeface="Calibri" pitchFamily="34" charset="0"/>
+                <a:ea typeface="Amiri" pitchFamily="2" charset="-78"/>
                 <a:cs typeface="Amiri" pitchFamily="2" charset="-78"/>
               </a:rPr>
               <a:t>لِذٰلِكَ أَتَكَلَّمُ</a:t>
@@ -8603,11 +8665,12 @@
               <a:buNone/>
             </a:pPr>
             <a:r>
-              <a:rPr lang="en-US" sz="950" b="1" dirty="0">
+              <a:rPr lang="ar-SA" sz="950" b="1" dirty="0">
                 <a:solidFill>
                   <a:srgbClr val="FFFFFF"/>
                 </a:solidFill>
                 <a:latin typeface="Calibri" pitchFamily="34" charset="0"/>
+                <a:ea typeface="Amiri" pitchFamily="2" charset="-78"/>
                 <a:cs typeface="Amiri" pitchFamily="2" charset="-78"/>
               </a:rPr>
               <a:t>أُتَرْجِمُ لِأُمِّي</a:t>
@@ -8668,11 +8731,12 @@
               <a:buNone/>
             </a:pPr>
             <a:r>
-              <a:rPr lang="en-US" sz="950" b="1" dirty="0">
+              <a:rPr lang="ar-SA" sz="950" b="1" dirty="0">
                 <a:solidFill>
                   <a:srgbClr val="FFFFFF"/>
                 </a:solidFill>
                 <a:latin typeface="Calibri" pitchFamily="34" charset="0"/>
+                <a:ea typeface="Amiri" pitchFamily="2" charset="-78"/>
                 <a:cs typeface="Amiri" pitchFamily="2" charset="-78"/>
               </a:rPr>
               <a:t>الطَّرِيقَةُ الَّتِي</a:t>
@@ -8733,11 +8797,12 @@
               <a:buNone/>
             </a:pPr>
             <a:r>
-              <a:rPr lang="en-US" sz="950" b="1" dirty="0">
+              <a:rPr lang="ar-SA" sz="950" b="1" dirty="0">
                 <a:solidFill>
                   <a:srgbClr val="FFFFFF"/>
                 </a:solidFill>
                 <a:latin typeface="Calibri" pitchFamily="34" charset="0"/>
+                <a:ea typeface="Amiri" pitchFamily="2" charset="-78"/>
                 <a:cs typeface="Amiri" pitchFamily="2" charset="-78"/>
               </a:rPr>
               <a:t>تَعَلُّمَ اللُّغَاتِ</a:t>
@@ -8871,6 +8936,7 @@
                   <a:srgbClr val="D4AF37"/>
                 </a:solidFill>
                 <a:latin typeface="Amiri" pitchFamily="2" charset="-78"/>
+                <a:ea typeface="Amiri" pitchFamily="2" charset="-78"/>
                 <a:cs typeface="Amiri" pitchFamily="2" charset="-78"/>
               </a:rPr>
               <a:t>م</a:t>
@@ -9128,6 +9194,7 @@
                   <a:srgbClr val="8A6D1E"/>
                 </a:solidFill>
                 <a:latin typeface="Amiri" pitchFamily="2" charset="-78"/>
+                <a:ea typeface="Amiri" pitchFamily="2" charset="-78"/>
                 <a:cs typeface="Amiri" pitchFamily="2" charset="-78"/>
               </a:rPr>
               <a:t>أ</a:t>
@@ -9192,6 +9259,7 @@
                   <a:srgbClr val="1B3B6F"/>
                 </a:solidFill>
                 <a:latin typeface="Amiri" pitchFamily="2" charset="-78"/>
+                <a:ea typeface="Amiri" pitchFamily="2" charset="-78"/>
                 <a:cs typeface="Amiri" pitchFamily="2" charset="-78"/>
               </a:rPr>
               <a:t>أ</a:t>
@@ -9243,6 +9311,7 @@
                   <a:srgbClr val="8A6D1E"/>
                 </a:solidFill>
                 <a:latin typeface="Amiri" pitchFamily="2" charset="-78"/>
+                <a:ea typeface="Amiri" pitchFamily="2" charset="-78"/>
                 <a:cs typeface="Amiri" pitchFamily="2" charset="-78"/>
               </a:rPr>
               <a:t>نَمُوذَجُ الإِجَابَةِ</a:t>
@@ -9356,6 +9425,7 @@
                   <a:srgbClr val="1F2A37"/>
                 </a:solidFill>
                 <a:latin typeface="Amiri" pitchFamily="2" charset="-78"/>
+                <a:ea typeface="Amiri" pitchFamily="2" charset="-78"/>
                 <a:cs typeface="Amiri" pitchFamily="2" charset="-78"/>
               </a:rPr>
               <a:t>حِينَ أَسْتَيْقِظُ صَبَاحًا، لَا أَعْرِفُ بِأَيِّ لُغَةٍ سَأَحْلُمُ فِي اللَّيْلِ! فَأَنَا أَعِيشُ يَوْمِي بَيْنَ ثَلَاثِ لُغَاتٍ: الإِنْجْلِيزِيَّةِ الَّتِي أَدْرُسُ بِهَا، وَالعَرَبِيَّةِ الَّتِي أُصَلِّي وَأُكَلِّمُ بِهَا جَدَّتِي، وَالفَرَنْسِيَّةِ الَّتِي بَدَأْتُ أَتَعَلَّمُهَا هٰذَا العَامَ، اسْتِعْدَادًا لِرِحْلَةٍ مَدْرَسِيَّةٍ إِلَى بَارِيسَ.</a:t>
@@ -9375,6 +9445,7 @@
                   <a:srgbClr val="1F2A37"/>
                 </a:solidFill>
                 <a:latin typeface="Amiri" pitchFamily="2" charset="-78"/>
+                <a:ea typeface="Amiri" pitchFamily="2" charset="-78"/>
                 <a:cs typeface="Amiri" pitchFamily="2" charset="-78"/>
               </a:rPr>
               <a:t>وَلَيْسَ هٰذَا التَّنَقُّلُ سَهْلًا دَائِمًا؛ فَكَثِيرًا مَا أَبْحَثُ عَنْ كَلِمَةٍ عَرَبِيَّةٍ فَلَا أَجِدُ إِلَّا مُقَابِلَهَا الإِنْجْلِيزِيَّ، مِمَّا يُضْحِكُ أَقَارِبِي فِي الخُرْطُومِ. غَيْرَ أَنَّنِي اكْتَشَفْتُ أَنَّ أَفْضَلَ طَرِيقَةٍ لِلتَّعَلُّمِ لَيْسَتِ الحِفْظَ، بَلِ الاسْتِعْمَالُ الحَقِيقِيُّ فِي مَوَاقِفِ الحَيَاةِ اليَوْمِيَّةِ، مَهْمَا كَثُرَتِ الأَخْطَاءُ.</a:t>
@@ -9394,6 +9465,7 @@
                   <a:srgbClr val="1F2A37"/>
                 </a:solidFill>
                 <a:latin typeface="Amiri" pitchFamily="2" charset="-78"/>
+                <a:ea typeface="Amiri" pitchFamily="2" charset="-78"/>
                 <a:cs typeface="Amiri" pitchFamily="2" charset="-78"/>
               </a:rPr>
               <a:t>لِذٰلِكَ صِرْتُ أُتَرْجِمُ لِأُمِّي فِي زِيَارَاتِهَا لِأُسْرَةِ أَبِي، وَأُشَارِكُ فِي تَبَادُلٍ لُغَوِيٍّ أُسْبُوعِيٍّ مَعَ طَالِبَةٍ أُرْدُنِيَّةٍ تُصَحِّحُ نُطْقِي وَأُصَحِّحُ قَوَاعِدَهَا. وَقَدْ عَلَّمَتْنِي هٰذِهِ التَّجَارِبُ أَنَّ التَّوَاصُلَ لَيْسَ كَلِمَاتٍ فَقَطْ، بَلْ إِصْغَاءٌ وَاحْتِرَامٌ أَيْضًا.</a:t>
@@ -9413,6 +9485,7 @@
                   <a:srgbClr val="1F2A37"/>
                 </a:solidFill>
                 <a:latin typeface="Amiri" pitchFamily="2" charset="-78"/>
+                <a:ea typeface="Amiri" pitchFamily="2" charset="-78"/>
                 <a:cs typeface="Amiri" pitchFamily="2" charset="-78"/>
               </a:rPr>
               <a:t>أَمَّا فِي المُسْتَقْبَلِ، فَأَطْمَحُ إِلَى أَنْ أَعْمَلَ مُتَرْجِمَةً فِي مُنَظَّمَةٍ إِنْسَانِيَّةٍ تَخْدُمُ اللَّاجِئِينَ وَالمُهَاجِرِينَ الجُدُدَ. وَلَوْ سُئِلْتُ عَنْ أَثْمَنِ هَدِيَّةٍ أَعْطَانِي إِيَّاهَا وَالِدَايَ، لَقُلْتُ: "لُغَتَانِ، وَقَلْبٌ يَفْهَمُ بِهِمَا".</a:t>
@@ -9511,11 +9584,12 @@
               <a:buNone/>
             </a:pPr>
             <a:r>
-              <a:rPr lang="en-US" sz="950" b="1" dirty="0">
+              <a:rPr lang="ar-SA" sz="950" b="1" dirty="0">
                 <a:solidFill>
                   <a:srgbClr val="FFFFFF"/>
                 </a:solidFill>
                 <a:latin typeface="Calibri" pitchFamily="34" charset="0"/>
+                <a:ea typeface="Amiri" pitchFamily="2" charset="-78"/>
                 <a:cs typeface="Amiri" pitchFamily="2" charset="-78"/>
               </a:rPr>
               <a:t>الَّتِي أَدْرُسُ بِهَا</a:t>
@@ -9576,11 +9650,12 @@
               <a:buNone/>
             </a:pPr>
             <a:r>
-              <a:rPr lang="en-US" sz="950" b="1" dirty="0">
+              <a:rPr lang="ar-SA" sz="950" b="1" dirty="0">
                 <a:solidFill>
                   <a:srgbClr val="FFFFFF"/>
                 </a:solidFill>
                 <a:latin typeface="Calibri" pitchFamily="34" charset="0"/>
+                <a:ea typeface="Amiri" pitchFamily="2" charset="-78"/>
                 <a:cs typeface="Amiri" pitchFamily="2" charset="-78"/>
               </a:rPr>
               <a:t>مِمَّا يُضْحِكُ</a:t>
@@ -9641,11 +9716,12 @@
               <a:buNone/>
             </a:pPr>
             <a:r>
-              <a:rPr lang="en-US" sz="950" b="1" dirty="0">
+              <a:rPr lang="ar-SA" sz="950" b="1" dirty="0">
                 <a:solidFill>
                   <a:srgbClr val="FFFFFF"/>
                 </a:solidFill>
                 <a:latin typeface="Calibri" pitchFamily="34" charset="0"/>
+                <a:ea typeface="Amiri" pitchFamily="2" charset="-78"/>
                 <a:cs typeface="Amiri" pitchFamily="2" charset="-78"/>
               </a:rPr>
               <a:t>لَيْسَتِ الحِفْظَ، بَلِ</a:t>
@@ -9706,11 +9782,12 @@
               <a:buNone/>
             </a:pPr>
             <a:r>
-              <a:rPr lang="en-US" sz="950" b="1" dirty="0">
+              <a:rPr lang="ar-SA" sz="950" b="1" dirty="0">
                 <a:solidFill>
                   <a:srgbClr val="FFFFFF"/>
                 </a:solidFill>
                 <a:latin typeface="Calibri" pitchFamily="34" charset="0"/>
+                <a:ea typeface="Amiri" pitchFamily="2" charset="-78"/>
                 <a:cs typeface="Amiri" pitchFamily="2" charset="-78"/>
               </a:rPr>
               <a:t>لَوْ سُئِلْتُ … لَقُلْتُ</a:t>
@@ -9844,6 +9921,7 @@
                   <a:srgbClr val="D4AF37"/>
                 </a:solidFill>
                 <a:latin typeface="Amiri" pitchFamily="2" charset="-78"/>
+                <a:ea typeface="Amiri" pitchFamily="2" charset="-78"/>
                 <a:cs typeface="Amiri" pitchFamily="2" charset="-78"/>
               </a:rPr>
               <a:t>م</a:t>
@@ -10101,6 +10179,7 @@
                   <a:srgbClr val="8A6D1E"/>
                 </a:solidFill>
                 <a:latin typeface="Amiri" pitchFamily="2" charset="-78"/>
+                <a:ea typeface="Amiri" pitchFamily="2" charset="-78"/>
                 <a:cs typeface="Amiri" pitchFamily="2" charset="-78"/>
               </a:rPr>
               <a:t>ب</a:t>
@@ -10165,6 +10244,7 @@
                   <a:srgbClr val="1B3B6F"/>
                 </a:solidFill>
                 <a:latin typeface="Amiri" pitchFamily="2" charset="-78"/>
+                <a:ea typeface="Amiri" pitchFamily="2" charset="-78"/>
                 <a:cs typeface="Amiri" pitchFamily="2" charset="-78"/>
               </a:rPr>
               <a:t>ب</a:t>
@@ -10216,6 +10296,7 @@
                   <a:srgbClr val="8A6D1E"/>
                 </a:solidFill>
                 <a:latin typeface="Amiri" pitchFamily="2" charset="-78"/>
+                <a:ea typeface="Amiri" pitchFamily="2" charset="-78"/>
                 <a:cs typeface="Amiri" pitchFamily="2" charset="-78"/>
               </a:rPr>
               <a:t>نَمُوذَجُ الإِجَابَةِ</a:t>
@@ -10329,6 +10410,7 @@
                   <a:srgbClr val="1F2A37"/>
                 </a:solidFill>
                 <a:latin typeface="Amiri" pitchFamily="2" charset="-78"/>
+                <a:ea typeface="Amiri" pitchFamily="2" charset="-78"/>
                 <a:cs typeface="Amiri" pitchFamily="2" charset="-78"/>
               </a:rPr>
               <a:t>قَبْلَ سَنَوَاتٍ قَلِيلَةٍ، كَانَ السَّائِحُ يَحْمِلُ قَامُوسًا وَرَقِيًّا ثَقِيلًا؛ أَمَّا اليَوْمَ فَيَكْفِيهِ أَنْ يُوَجِّهَ هَاتِفَهُ إِلَى لَافِتَةٍ لِيَقْرَأَهَا بِلُغَتِهِ فِي ثَانِيَةٍ. فَهَلْ سَتُغْنِينَا التَّرْجَمَةُ الآلِيَّةُ عَنْ تَعَلُّمِ اللُّغَاتِ؟</a:t>
@@ -10348,6 +10430,7 @@
                   <a:srgbClr val="1F2A37"/>
                 </a:solidFill>
                 <a:latin typeface="Amiri" pitchFamily="2" charset="-78"/>
+                <a:ea typeface="Amiri" pitchFamily="2" charset="-78"/>
                 <a:cs typeface="Amiri" pitchFamily="2" charset="-78"/>
               </a:rPr>
               <a:t>لَا شَكَّ أَنَّ هٰذِهِ التِّكْنُولُوجْيَا مُفِيدَةٌ جِدًّا؛ فَهِيَ تُسَاعِدُ المُسَافِرِينَ وَالمَرْضَى وَاللَّاجِئِينَ عَلَى التَّوَاصُلِ فِي لَحَظَاتٍ صَعْبَةٍ، كَمَا أَنَّهَا سَرِيعَةٌ وَمَجَّانِيَّةٌ، وَتَتَحَسَّنُ عَامًا بَعْدَ عَامٍ. وَمَعَ ذٰلِكَ، فَإِنَّهَا تُتَرْجِمُ الكَلِمَاتِ لَا المَعَانِيَ؛ إِذْ لَا تَفْهَمُ النُّكْتَةَ وَلَا المَثَلَ وَلَا نَبْرَةَ الصَّوْتِ.</a:t>
@@ -10367,6 +10450,7 @@
                   <a:srgbClr val="1F2A37"/>
                 </a:solidFill>
                 <a:latin typeface="Amiri" pitchFamily="2" charset="-78"/>
+                <a:ea typeface="Amiri" pitchFamily="2" charset="-78"/>
                 <a:cs typeface="Amiri" pitchFamily="2" charset="-78"/>
               </a:rPr>
               <a:t>وَقَدْ رَأَيْتُ ذٰلِكَ بِنَفْسِي عِنْدَمَا اسْتَخْدَمَتْ زَمِيلَتِي تَطْبِيقًا لِتُرْسِلَ تَهْنِئَةً بِالعِيدِ إِلَى جَارَتِهَا العَرَبِيَّةِ، فَخَرَجَتِ الرِّسَالَةُ غَرِيبَةً، وَضَحِكَتِ الجَارَةُ كَثِيرًا، لٰكِنَّ زَمِيلَتِي شَعَرَتْ بِالحَرَجِ الشَّدِيدِ. وَبَعْدَ أَنْ عَلَّمْتُهَا العِبَارَةَ الصَّحِيحَةَ، صَارَتْ تُحَيِّيهَا بِهَا كُلَّ عِيدٍ.</a:t>
@@ -10386,6 +10470,7 @@
                   <a:srgbClr val="1F2A37"/>
                 </a:solidFill>
                 <a:latin typeface="Amiri" pitchFamily="2" charset="-78"/>
+                <a:ea typeface="Amiri" pitchFamily="2" charset="-78"/>
                 <a:cs typeface="Amiri" pitchFamily="2" charset="-78"/>
               </a:rPr>
               <a:t>أَرَى أَنَّ الآلَةَ أَدَاةٌ مُمْتَازَةٌ، غَيْرَ أَنَّهَا لَا تَسْتَطِيعُ أَنْ تَبْنِيَ صَدَاقَةً أَوْ ثِقَةً بَيْنَ شَخْصَيْنِ مِنْ ثَقَافَتَيْنِ مُخْتَلِفَتَيْنِ. فَإِذَا أَرَدْنَا أَنْ نَفْهَمَ النَّاسَ حَقًّا، فَسَنَظَلُّ نَحْتَاجُ إِلَى تَعَلُّمِ لُغَاتِهِمْ وَثَقَافَاتِهِمْ.</a:t>
@@ -10484,11 +10569,12 @@
               <a:buNone/>
             </a:pPr>
             <a:r>
-              <a:rPr lang="en-US" sz="950" b="1" dirty="0">
+              <a:rPr lang="ar-SA" sz="950" b="1" dirty="0">
                 <a:solidFill>
                   <a:srgbClr val="FFFFFF"/>
                 </a:solidFill>
                 <a:latin typeface="Calibri" pitchFamily="34" charset="0"/>
+                <a:ea typeface="Amiri" pitchFamily="2" charset="-78"/>
                 <a:cs typeface="Amiri" pitchFamily="2" charset="-78"/>
               </a:rPr>
               <a:t>أَمَّا اليَوْمَ فَيَكْفِيهِ</a:t>
@@ -10549,11 +10635,12 @@
               <a:buNone/>
             </a:pPr>
             <a:r>
-              <a:rPr lang="en-US" sz="950" b="1" dirty="0">
+              <a:rPr lang="ar-SA" sz="950" b="1" dirty="0">
                 <a:solidFill>
                   <a:srgbClr val="FFFFFF"/>
                 </a:solidFill>
                 <a:latin typeface="Calibri" pitchFamily="34" charset="0"/>
+                <a:ea typeface="Amiri" pitchFamily="2" charset="-78"/>
                 <a:cs typeface="Amiri" pitchFamily="2" charset="-78"/>
               </a:rPr>
               <a:t>لَا شَكَّ أَنَّ</a:t>
@@ -10614,11 +10701,12 @@
               <a:buNone/>
             </a:pPr>
             <a:r>
-              <a:rPr lang="en-US" sz="950" b="1" dirty="0">
+              <a:rPr lang="ar-SA" sz="950" b="1" dirty="0">
                 <a:solidFill>
                   <a:srgbClr val="FFFFFF"/>
                 </a:solidFill>
                 <a:latin typeface="Calibri" pitchFamily="34" charset="0"/>
+                <a:ea typeface="Amiri" pitchFamily="2" charset="-78"/>
                 <a:cs typeface="Amiri" pitchFamily="2" charset="-78"/>
               </a:rPr>
               <a:t>الكَلِمَاتِ لَا المَعَانِيَ</a:t>
@@ -10679,11 +10767,12 @@
               <a:buNone/>
             </a:pPr>
             <a:r>
-              <a:rPr lang="en-US" sz="950" b="1" dirty="0">
+              <a:rPr lang="ar-SA" sz="950" b="1" dirty="0">
                 <a:solidFill>
                   <a:srgbClr val="FFFFFF"/>
                 </a:solidFill>
                 <a:latin typeface="Calibri" pitchFamily="34" charset="0"/>
+                <a:ea typeface="Amiri" pitchFamily="2" charset="-78"/>
                 <a:cs typeface="Amiri" pitchFamily="2" charset="-78"/>
               </a:rPr>
               <a:t>إِذَا أَرَدْنَا … فَسَنَظَلُّ</a:t>
@@ -10817,6 +10906,7 @@
                   <a:srgbClr val="D4AF37"/>
                 </a:solidFill>
                 <a:latin typeface="Amiri" pitchFamily="2" charset="-78"/>
+                <a:ea typeface="Amiri" pitchFamily="2" charset="-78"/>
                 <a:cs typeface="Amiri" pitchFamily="2" charset="-78"/>
               </a:rPr>
               <a:t>م</a:t>
@@ -11137,6 +11227,7 @@
                   <a:srgbClr val="8A6D1E"/>
                 </a:solidFill>
                 <a:latin typeface="Amiri" pitchFamily="2" charset="-78"/>
+                <a:ea typeface="Amiri" pitchFamily="2" charset="-78"/>
                 <a:cs typeface="Amiri" pitchFamily="2" charset="-78"/>
               </a:rPr>
               <a:t>قَيِّمْ عَمَلَكَ</a:t>
@@ -12381,6 +12472,7 @@
                   <a:srgbClr val="FFFFFF"/>
                 </a:solidFill>
                 <a:latin typeface="Amiri" pitchFamily="2" charset="-78"/>
+                <a:ea typeface="Amiri" pitchFamily="2" charset="-78"/>
                 <a:cs typeface="Amiri" pitchFamily="2" charset="-78"/>
               </a:rPr>
               <a:t>أَحْسَنْتُمْ! إِلَى اللِّقَاءِ</a:t>
@@ -12533,6 +12625,7 @@
                   <a:srgbClr val="D4AF37"/>
                 </a:solidFill>
                 <a:latin typeface="Amiri" pitchFamily="2" charset="-78"/>
+                <a:ea typeface="Amiri" pitchFamily="2" charset="-78"/>
                 <a:cs typeface="Amiri" pitchFamily="2" charset="-78"/>
               </a:rPr>
               <a:t>وَرْشَةُ التَّدْرِيبِ</a:t>
@@ -12666,6 +12759,7 @@
                   <a:srgbClr val="D4AF37"/>
                 </a:solidFill>
                 <a:latin typeface="Amiri" pitchFamily="2" charset="-78"/>
+                <a:ea typeface="Amiri" pitchFamily="2" charset="-78"/>
                 <a:cs typeface="Amiri" pitchFamily="2" charset="-78"/>
               </a:rPr>
               <a:t>م</a:t>
@@ -12986,6 +13080,7 @@
                   <a:srgbClr val="8A6D1E"/>
                 </a:solidFill>
                 <a:latin typeface="Amiri" pitchFamily="2" charset="-78"/>
+                <a:ea typeface="Amiri" pitchFamily="2" charset="-78"/>
                 <a:cs typeface="Amiri" pitchFamily="2" charset="-78"/>
               </a:rPr>
               <a:t>آدَابُ الصَّفِّ</a:t>
@@ -14517,6 +14612,7 @@
                   <a:srgbClr val="D4AF37"/>
                 </a:solidFill>
                 <a:latin typeface="Amiri" pitchFamily="2" charset="-78"/>
+                <a:ea typeface="Amiri" pitchFamily="2" charset="-78"/>
                 <a:cs typeface="Amiri" pitchFamily="2" charset="-78"/>
               </a:rPr>
               <a:t>م</a:t>
@@ -14837,6 +14933,7 @@
                   <a:srgbClr val="8A6D1E"/>
                 </a:solidFill>
                 <a:latin typeface="Amiri" pitchFamily="2" charset="-78"/>
+                <a:ea typeface="Amiri" pitchFamily="2" charset="-78"/>
                 <a:cs typeface="Amiri" pitchFamily="2" charset="-78"/>
               </a:rPr>
               <a:t>خَرِيطَةُ الوَرْشَةِ</a:t>
@@ -15151,6 +15248,7 @@
                   <a:srgbClr val="1B3B6F"/>
                 </a:solidFill>
                 <a:latin typeface="Amiri" pitchFamily="2" charset="-78"/>
+                <a:ea typeface="Amiri" pitchFamily="2" charset="-78"/>
                 <a:cs typeface="Amiri" pitchFamily="2" charset="-78"/>
               </a:rPr>
               <a:t>كَيْفَ</a:t>
@@ -15427,6 +15525,7 @@
                   <a:srgbClr val="1E6B52"/>
                 </a:solidFill>
                 <a:latin typeface="Amiri" pitchFamily="2" charset="-78"/>
+                <a:ea typeface="Amiri" pitchFamily="2" charset="-78"/>
                 <a:cs typeface="Amiri" pitchFamily="2" charset="-78"/>
               </a:rPr>
               <a:t>الاسْتِمَارَةُ</a:t>
@@ -15703,6 +15802,7 @@
                   <a:srgbClr val="1E6B52"/>
                 </a:solidFill>
                 <a:latin typeface="Amiri" pitchFamily="2" charset="-78"/>
+                <a:ea typeface="Amiri" pitchFamily="2" charset="-78"/>
                 <a:cs typeface="Amiri" pitchFamily="2" charset="-78"/>
               </a:rPr>
               <a:t>الرِّسَالَةُ</a:t>
@@ -15979,6 +16079,7 @@
                   <a:srgbClr val="1E6B52"/>
                 </a:solidFill>
                 <a:latin typeface="Amiri" pitchFamily="2" charset="-78"/>
+                <a:ea typeface="Amiri" pitchFamily="2" charset="-78"/>
                 <a:cs typeface="Amiri" pitchFamily="2" charset="-78"/>
               </a:rPr>
               <a:t>المَقَالُ</a:t>
@@ -16255,6 +16356,7 @@
                   <a:srgbClr val="8A6D1E"/>
                 </a:solidFill>
                 <a:latin typeface="Amiri" pitchFamily="2" charset="-78"/>
+                <a:ea typeface="Amiri" pitchFamily="2" charset="-78"/>
                 <a:cs typeface="Amiri" pitchFamily="2" charset="-78"/>
               </a:rPr>
               <a:t>قَيِّمْ</a:t>
@@ -16498,6 +16600,7 @@
                   <a:srgbClr val="D4AF37"/>
                 </a:solidFill>
                 <a:latin typeface="Amiri" pitchFamily="2" charset="-78"/>
+                <a:ea typeface="Amiri" pitchFamily="2" charset="-78"/>
                 <a:cs typeface="Amiri" pitchFamily="2" charset="-78"/>
               </a:rPr>
               <a:t>م</a:t>
@@ -16818,6 +16921,7 @@
                   <a:srgbClr val="8A6D1E"/>
                 </a:solidFill>
                 <a:latin typeface="Amiri" pitchFamily="2" charset="-78"/>
+                <a:ea typeface="Amiri" pitchFamily="2" charset="-78"/>
                 <a:cs typeface="Amiri" pitchFamily="2" charset="-78"/>
               </a:rPr>
               <a:t>امْتِحَانُ الكِتَابَةِ</a:t>
@@ -17442,6 +17546,7 @@
                   <a:srgbClr val="1B3B6F"/>
                 </a:solidFill>
                 <a:latin typeface="Amiri" pitchFamily="2" charset="-78"/>
+                <a:ea typeface="Amiri" pitchFamily="2" charset="-78"/>
                 <a:cs typeface="Amiri" pitchFamily="2" charset="-78"/>
               </a:rPr>
               <a:t>تَعَلُّمُ اللُّغَةِ بِهٰذِهِ الطَّرِيقَةِ مُمْتِعٌ جِدًّا</a:t>
@@ -17541,6 +17646,7 @@
                   <a:srgbClr val="1B3B6F"/>
                 </a:solidFill>
                 <a:latin typeface="Amiri" pitchFamily="2" charset="-78"/>
+                <a:ea typeface="Amiri" pitchFamily="2" charset="-78"/>
                 <a:cs typeface="Amiri" pitchFamily="2" charset="-78"/>
               </a:rPr>
               <a:t>الطَّرِيقَةُ الَّتِي تُسَاعِدُنِي أَكْثَرَ هِيَ …</a:t>
@@ -17640,6 +17746,7 @@
                   <a:srgbClr val="1B3B6F"/>
                 </a:solidFill>
                 <a:latin typeface="Amiri" pitchFamily="2" charset="-78"/>
+                <a:ea typeface="Amiri" pitchFamily="2" charset="-78"/>
                 <a:cs typeface="Amiri" pitchFamily="2" charset="-78"/>
               </a:rPr>
               <a:t>جَدَّتِي لَا تَتَكَلَّمُ الإِنْجْلِيزِيَّةَ، لِذٰلِكَ …</a:t>
@@ -17811,6 +17918,7 @@
                   <a:srgbClr val="D4AF37"/>
                 </a:solidFill>
                 <a:latin typeface="Amiri" pitchFamily="2" charset="-78"/>
+                <a:ea typeface="Amiri" pitchFamily="2" charset="-78"/>
                 <a:cs typeface="Amiri" pitchFamily="2" charset="-78"/>
               </a:rPr>
               <a:t>م</a:t>
@@ -18131,6 +18239,7 @@
                   <a:srgbClr val="8A6D1E"/>
                 </a:solidFill>
                 <a:latin typeface="Amiri" pitchFamily="2" charset="-78"/>
+                <a:ea typeface="Amiri" pitchFamily="2" charset="-78"/>
                 <a:cs typeface="Amiri" pitchFamily="2" charset="-78"/>
               </a:rPr>
               <a:t>اسْتِمَارَةُ طَلَبِ تَبَادُلٍ لُغَوِيٍّ</a:t>
@@ -18487,6 +18596,7 @@
                   <a:srgbClr val="1B3B6F"/>
                 </a:solidFill>
                 <a:latin typeface="Amiri" pitchFamily="2" charset="-78"/>
+                <a:ea typeface="Amiri" pitchFamily="2" charset="-78"/>
                 <a:cs typeface="Amiri" pitchFamily="2" charset="-78"/>
               </a:rPr>
               <a:t>الاسْمُ</a:t>
@@ -18731,6 +18841,7 @@
                   <a:srgbClr val="1B3B6F"/>
                 </a:solidFill>
                 <a:latin typeface="Amiri" pitchFamily="2" charset="-78"/>
+                <a:ea typeface="Amiri" pitchFamily="2" charset="-78"/>
                 <a:cs typeface="Amiri" pitchFamily="2" charset="-78"/>
               </a:rPr>
               <a:t>العُمْرُ</a:t>
@@ -18975,6 +19086,7 @@
                   <a:srgbClr val="1B3B6F"/>
                 </a:solidFill>
                 <a:latin typeface="Amiri" pitchFamily="2" charset="-78"/>
+                <a:ea typeface="Amiri" pitchFamily="2" charset="-78"/>
                 <a:cs typeface="Amiri" pitchFamily="2" charset="-78"/>
               </a:rPr>
               <a:t>اللُّغَاتُ الَّتِي تَتَكَلَّمُهَا</a:t>
@@ -19219,6 +19331,7 @@
                   <a:srgbClr val="1B3B6F"/>
                 </a:solidFill>
                 <a:latin typeface="Amiri" pitchFamily="2" charset="-78"/>
+                <a:ea typeface="Amiri" pitchFamily="2" charset="-78"/>
                 <a:cs typeface="Amiri" pitchFamily="2" charset="-78"/>
               </a:rPr>
               <a:t>اللُّغَةُ الَّتِي تُرِيدُ تَعَلُّمَهَا</a:t>
@@ -19463,6 +19576,7 @@
                   <a:srgbClr val="1B3B6F"/>
                 </a:solidFill>
                 <a:latin typeface="Amiri" pitchFamily="2" charset="-78"/>
+                <a:ea typeface="Amiri" pitchFamily="2" charset="-78"/>
                 <a:cs typeface="Amiri" pitchFamily="2" charset="-78"/>
               </a:rPr>
               <a:t>المُسْتَوَى</a:t>
@@ -19707,6 +19821,7 @@
                   <a:srgbClr val="1B3B6F"/>
                 </a:solidFill>
                 <a:latin typeface="Amiri" pitchFamily="2" charset="-78"/>
+                <a:ea typeface="Amiri" pitchFamily="2" charset="-78"/>
                 <a:cs typeface="Amiri" pitchFamily="2" charset="-78"/>
               </a:rPr>
               <a:t>طَرِيقَةُ التَّوَاصُلِ</a:t>
@@ -19951,6 +20066,7 @@
                   <a:srgbClr val="1B3B6F"/>
                 </a:solidFill>
                 <a:latin typeface="Amiri" pitchFamily="2" charset="-78"/>
+                <a:ea typeface="Amiri" pitchFamily="2" charset="-78"/>
                 <a:cs typeface="Amiri" pitchFamily="2" charset="-78"/>
               </a:rPr>
               <a:t>الأَوْقَاتُ المُنَاسِبَةُ</a:t>
@@ -20130,6 +20246,7 @@
                   <a:srgbClr val="1B3B6F"/>
                 </a:solidFill>
                 <a:latin typeface="Amiri" pitchFamily="2" charset="-78"/>
+                <a:ea typeface="Amiri" pitchFamily="2" charset="-78"/>
                 <a:cs typeface="Amiri" pitchFamily="2" charset="-78"/>
               </a:rPr>
               <a:t>جُمْلَةٌ: مَا هَدَفُكَ مِنَ التَّبَادُلِ؟</a:t>
@@ -20339,6 +20456,7 @@
                   <a:srgbClr val="D4AF37"/>
                 </a:solidFill>
                 <a:latin typeface="Amiri" pitchFamily="2" charset="-78"/>
+                <a:ea typeface="Amiri" pitchFamily="2" charset="-78"/>
                 <a:cs typeface="Amiri" pitchFamily="2" charset="-78"/>
               </a:rPr>
               <a:t>م</a:t>
@@ -20659,6 +20777,7 @@
                   <a:srgbClr val="8A6D1E"/>
                 </a:solidFill>
                 <a:latin typeface="Amiri" pitchFamily="2" charset="-78"/>
+                <a:ea typeface="Amiri" pitchFamily="2" charset="-78"/>
                 <a:cs typeface="Amiri" pitchFamily="2" charset="-78"/>
               </a:rPr>
               <a:t>نَمُوذَجُ الإِجَابَةِ</a:t>
@@ -20977,6 +21096,7 @@
                   <a:srgbClr val="1B3B6F"/>
                 </a:solidFill>
                 <a:latin typeface="Amiri" pitchFamily="2" charset="-78"/>
+                <a:ea typeface="Amiri" pitchFamily="2" charset="-78"/>
                 <a:cs typeface="Amiri" pitchFamily="2" charset="-78"/>
               </a:rPr>
               <a:t>سَلْمَى أَحْمَدُ</a:t>
@@ -21015,6 +21135,7 @@
                   <a:srgbClr val="1B3B6F"/>
                 </a:solidFill>
                 <a:latin typeface="Amiri" pitchFamily="2" charset="-78"/>
+                <a:ea typeface="Amiri" pitchFamily="2" charset="-78"/>
                 <a:cs typeface="Amiri" pitchFamily="2" charset="-78"/>
               </a:rPr>
               <a:t>الاسْمُ</a:t>
@@ -21156,6 +21277,7 @@
                   <a:srgbClr val="1B3B6F"/>
                 </a:solidFill>
                 <a:latin typeface="Amiri" pitchFamily="2" charset="-78"/>
+                <a:ea typeface="Amiri" pitchFamily="2" charset="-78"/>
                 <a:cs typeface="Amiri" pitchFamily="2" charset="-78"/>
               </a:rPr>
               <a:t>سِتَّ عَشْرَةَ سَنَةً</a:t>
@@ -21194,6 +21316,7 @@
                   <a:srgbClr val="1B3B6F"/>
                 </a:solidFill>
                 <a:latin typeface="Amiri" pitchFamily="2" charset="-78"/>
+                <a:ea typeface="Amiri" pitchFamily="2" charset="-78"/>
                 <a:cs typeface="Amiri" pitchFamily="2" charset="-78"/>
               </a:rPr>
               <a:t>العُمْرُ</a:t>
@@ -21335,6 +21458,7 @@
                   <a:srgbClr val="1B3B6F"/>
                 </a:solidFill>
                 <a:latin typeface="Amiri" pitchFamily="2" charset="-78"/>
+                <a:ea typeface="Amiri" pitchFamily="2" charset="-78"/>
                 <a:cs typeface="Amiri" pitchFamily="2" charset="-78"/>
               </a:rPr>
               <a:t>الإِنْجْلِيزِيَّةُ وَالعَرَبِيَّةُ</a:t>
@@ -21373,6 +21497,7 @@
                   <a:srgbClr val="1B3B6F"/>
                 </a:solidFill>
                 <a:latin typeface="Amiri" pitchFamily="2" charset="-78"/>
+                <a:ea typeface="Amiri" pitchFamily="2" charset="-78"/>
                 <a:cs typeface="Amiri" pitchFamily="2" charset="-78"/>
               </a:rPr>
               <a:t>اللُّغَاتُ الَّتِي تَتَكَلَّمُهَا</a:t>
@@ -21514,6 +21639,7 @@
                   <a:srgbClr val="1B3B6F"/>
                 </a:solidFill>
                 <a:latin typeface="Amiri" pitchFamily="2" charset="-78"/>
+                <a:ea typeface="Amiri" pitchFamily="2" charset="-78"/>
                 <a:cs typeface="Amiri" pitchFamily="2" charset="-78"/>
               </a:rPr>
               <a:t>الفَرَنْسِيَّةُ</a:t>
@@ -21552,6 +21678,7 @@
                   <a:srgbClr val="1B3B6F"/>
                 </a:solidFill>
                 <a:latin typeface="Amiri" pitchFamily="2" charset="-78"/>
+                <a:ea typeface="Amiri" pitchFamily="2" charset="-78"/>
                 <a:cs typeface="Amiri" pitchFamily="2" charset="-78"/>
               </a:rPr>
               <a:t>اللُّغَةُ الَّتِي تُرِيدُ تَعَلُّمَهَا</a:t>
@@ -21693,6 +21820,7 @@
                   <a:srgbClr val="1B3B6F"/>
                 </a:solidFill>
                 <a:latin typeface="Amiri" pitchFamily="2" charset="-78"/>
+                <a:ea typeface="Amiri" pitchFamily="2" charset="-78"/>
                 <a:cs typeface="Amiri" pitchFamily="2" charset="-78"/>
               </a:rPr>
               <a:t>مُبْتَدِئَةٌ</a:t>
@@ -21731,6 +21859,7 @@
                   <a:srgbClr val="1B3B6F"/>
                 </a:solidFill>
                 <a:latin typeface="Amiri" pitchFamily="2" charset="-78"/>
+                <a:ea typeface="Amiri" pitchFamily="2" charset="-78"/>
                 <a:cs typeface="Amiri" pitchFamily="2" charset="-78"/>
               </a:rPr>
               <a:t>المُسْتَوَى</a:t>
@@ -21872,6 +22001,7 @@
                   <a:srgbClr val="1B3B6F"/>
                 </a:solidFill>
                 <a:latin typeface="Amiri" pitchFamily="2" charset="-78"/>
+                <a:ea typeface="Amiri" pitchFamily="2" charset="-78"/>
                 <a:cs typeface="Amiri" pitchFamily="2" charset="-78"/>
               </a:rPr>
               <a:t>مُكَالَمَةُ فِيدْيُو</a:t>
@@ -21910,6 +22040,7 @@
                   <a:srgbClr val="1B3B6F"/>
                 </a:solidFill>
                 <a:latin typeface="Amiri" pitchFamily="2" charset="-78"/>
+                <a:ea typeface="Amiri" pitchFamily="2" charset="-78"/>
                 <a:cs typeface="Amiri" pitchFamily="2" charset="-78"/>
               </a:rPr>
               <a:t>طَرِيقَةُ التَّوَاصُلِ</a:t>
@@ -22051,6 +22182,7 @@
                   <a:srgbClr val="1B3B6F"/>
                 </a:solidFill>
                 <a:latin typeface="Amiri" pitchFamily="2" charset="-78"/>
+                <a:ea typeface="Amiri" pitchFamily="2" charset="-78"/>
                 <a:cs typeface="Amiri" pitchFamily="2" charset="-78"/>
               </a:rPr>
               <a:t>مَسَاءَ الثُّلَاثَاءِ وَالخَمِيسِ</a:t>
@@ -22089,6 +22221,7 @@
                   <a:srgbClr val="1B3B6F"/>
                 </a:solidFill>
                 <a:latin typeface="Amiri" pitchFamily="2" charset="-78"/>
+                <a:ea typeface="Amiri" pitchFamily="2" charset="-78"/>
                 <a:cs typeface="Amiri" pitchFamily="2" charset="-78"/>
               </a:rPr>
               <a:t>الأَوْقَاتُ المُنَاسِبَةُ</a:t>
@@ -22230,6 +22363,7 @@
                   <a:srgbClr val="1B3B6F"/>
                 </a:solidFill>
                 <a:latin typeface="Amiri" pitchFamily="2" charset="-78"/>
+                <a:ea typeface="Amiri" pitchFamily="2" charset="-78"/>
                 <a:cs typeface="Amiri" pitchFamily="2" charset="-78"/>
               </a:rPr>
               <a:t>أُرِيدُ تَحْسِينَ نُطْقِي، لِأَنِّي سَأُسَافِرُ إِلَى فَرَنْسَا فِي الصَّيْفِ.</a:t>
@@ -22268,6 +22402,7 @@
                   <a:srgbClr val="1B3B6F"/>
                 </a:solidFill>
                 <a:latin typeface="Amiri" pitchFamily="2" charset="-78"/>
+                <a:ea typeface="Amiri" pitchFamily="2" charset="-78"/>
                 <a:cs typeface="Amiri" pitchFamily="2" charset="-78"/>
               </a:rPr>
               <a:t>جُمْلَةٌ: مَا هَدَفُكَ مِنَ التَّبَادُلِ؟</a:t>
@@ -22477,6 +22612,7 @@
                   <a:srgbClr val="D4AF37"/>
                 </a:solidFill>
                 <a:latin typeface="Amiri" pitchFamily="2" charset="-78"/>
+                <a:ea typeface="Amiri" pitchFamily="2" charset="-78"/>
                 <a:cs typeface="Amiri" pitchFamily="2" charset="-78"/>
               </a:rPr>
               <a:t>م</a:t>
@@ -22797,6 +22933,7 @@
                   <a:srgbClr val="8A6D1E"/>
                 </a:solidFill>
                 <a:latin typeface="Amiri" pitchFamily="2" charset="-78"/>
+                <a:ea typeface="Amiri" pitchFamily="2" charset="-78"/>
                 <a:cs typeface="Amiri" pitchFamily="2" charset="-78"/>
               </a:rPr>
               <a:t>تَبَادُلِي اللُّغَوِيُّ</a:t>
@@ -23272,6 +23409,7 @@
                   <a:srgbClr val="1B3B6F"/>
                 </a:solidFill>
                 <a:latin typeface="Amiri" pitchFamily="2" charset="-78"/>
+                <a:ea typeface="Amiri" pitchFamily="2" charset="-78"/>
                 <a:cs typeface="Amiri" pitchFamily="2" charset="-78"/>
               </a:rPr>
               <a:t>بَدَأْتُ تَبَادُلًا لُغَوِيًّا مَعَ …</a:t>
@@ -23348,6 +23486,7 @@
                   <a:srgbClr val="1B3B6F"/>
                 </a:solidFill>
                 <a:latin typeface="Amiri" pitchFamily="2" charset="-78"/>
+                <a:ea typeface="Amiri" pitchFamily="2" charset="-78"/>
                 <a:cs typeface="Amiri" pitchFamily="2" charset="-78"/>
               </a:rPr>
               <a:t>نَتَوَاصَلُ بِالفِيدْيُو مَرَّتَيْنِ فِي الأُسْبُوعِ</a:t>
@@ -23424,6 +23563,7 @@
                   <a:srgbClr val="1B3B6F"/>
                 </a:solidFill>
                 <a:latin typeface="Amiri" pitchFamily="2" charset="-78"/>
+                <a:ea typeface="Amiri" pitchFamily="2" charset="-78"/>
                 <a:cs typeface="Amiri" pitchFamily="2" charset="-78"/>
               </a:rPr>
               <a:t>تَعَلُّمُ اللُّغَةِ بِهٰذِهِ الطَّرِيقَةِ …</a:t>
@@ -23500,6 +23640,7 @@
                   <a:srgbClr val="1B3B6F"/>
                 </a:solidFill>
                 <a:latin typeface="Amiri" pitchFamily="2" charset="-78"/>
+                <a:ea typeface="Amiri" pitchFamily="2" charset="-78"/>
                 <a:cs typeface="Amiri" pitchFamily="2" charset="-78"/>
               </a:rPr>
               <a:t>فِي الصَّيْفِ سَأَزُورُ …</a:t>
@@ -23671,6 +23812,7 @@
                   <a:srgbClr val="D4AF37"/>
                 </a:solidFill>
                 <a:latin typeface="Amiri" pitchFamily="2" charset="-78"/>
+                <a:ea typeface="Amiri" pitchFamily="2" charset="-78"/>
                 <a:cs typeface="Amiri" pitchFamily="2" charset="-78"/>
               </a:rPr>
               <a:t>م</a:t>
@@ -23991,6 +24133,7 @@
                   <a:srgbClr val="8A6D1E"/>
                 </a:solidFill>
                 <a:latin typeface="Amiri" pitchFamily="2" charset="-78"/>
+                <a:ea typeface="Amiri" pitchFamily="2" charset="-78"/>
                 <a:cs typeface="Amiri" pitchFamily="2" charset="-78"/>
               </a:rPr>
               <a:t>نَصُّ السُّؤَالِ</a:t>
@@ -24271,6 +24414,7 @@
                   <a:srgbClr val="1B3B6F"/>
                 </a:solidFill>
                 <a:latin typeface="Amiri" pitchFamily="2" charset="-78"/>
+                <a:ea typeface="Amiri" pitchFamily="2" charset="-78"/>
                 <a:cs typeface="Amiri" pitchFamily="2" charset="-78"/>
               </a:rPr>
               <a:t>اكْتُبِي رِسَالَةً إِلَى صَدِيقَتِكِ عَنْ تَبَادُلِكِ اللُّغَوِيِّ (٨٠–٩٠ كَلِمَةً).</a:t>
@@ -24412,6 +24556,7 @@
                   <a:srgbClr val="1B3B6F"/>
                 </a:solidFill>
                 <a:latin typeface="Amiri" pitchFamily="2" charset="-78"/>
+                <a:ea typeface="Amiri" pitchFamily="2" charset="-78"/>
                 <a:cs typeface="Amiri" pitchFamily="2" charset="-78"/>
               </a:rPr>
               <a:t>مَنْ شَرِيكَتُكِ فِي التَّبَادُلِ؟</a:t>
@@ -24553,6 +24698,7 @@
                   <a:srgbClr val="1B3B6F"/>
                 </a:solidFill>
                 <a:latin typeface="Amiri" pitchFamily="2" charset="-78"/>
+                <a:ea typeface="Amiri" pitchFamily="2" charset="-78"/>
                 <a:cs typeface="Amiri" pitchFamily="2" charset="-78"/>
               </a:rPr>
               <a:t>كَيْفَ تَتَوَاصَلَانِ؟ وَكَمْ مَرَّةً؟</a:t>
@@ -24694,6 +24840,7 @@
                   <a:srgbClr val="1B3B6F"/>
                 </a:solidFill>
                 <a:latin typeface="Amiri" pitchFamily="2" charset="-78"/>
+                <a:ea typeface="Amiri" pitchFamily="2" charset="-78"/>
                 <a:cs typeface="Amiri" pitchFamily="2" charset="-78"/>
               </a:rPr>
               <a:t>مَاذَا تَفْعَلَانِ؟ وَمَا رَأْيُكِ؟</a:t>
@@ -24835,6 +24982,7 @@
                   <a:srgbClr val="1B3B6F"/>
                 </a:solidFill>
                 <a:latin typeface="Amiri" pitchFamily="2" charset="-78"/>
+                <a:ea typeface="Amiri" pitchFamily="2" charset="-78"/>
                 <a:cs typeface="Amiri" pitchFamily="2" charset="-78"/>
               </a:rPr>
               <a:t>مَا خِطَطُكِ؟ وَاسْأَلِي صَدِيقَتَكِ سُؤَالًا.</a:t>
@@ -25044,6 +25192,7 @@
                   <a:srgbClr val="D4AF37"/>
                 </a:solidFill>
                 <a:latin typeface="Amiri" pitchFamily="2" charset="-78"/>
+                <a:ea typeface="Amiri" pitchFamily="2" charset="-78"/>
                 <a:cs typeface="Amiri" pitchFamily="2" charset="-78"/>
               </a:rPr>
               <a:t>م</a:t>
@@ -25364,6 +25513,7 @@
                   <a:srgbClr val="8A6D1E"/>
                 </a:solidFill>
                 <a:latin typeface="Amiri" pitchFamily="2" charset="-78"/>
+                <a:ea typeface="Amiri" pitchFamily="2" charset="-78"/>
                 <a:cs typeface="Amiri" pitchFamily="2" charset="-78"/>
               </a:rPr>
               <a:t>قَوَالِبُ الكِتَابَةِ</a:t>
@@ -25644,6 +25794,7 @@
                   <a:srgbClr val="1B3B6F"/>
                 </a:solidFill>
                 <a:latin typeface="Amiri" pitchFamily="2" charset="-78"/>
+                <a:ea typeface="Amiri" pitchFamily="2" charset="-78"/>
                 <a:cs typeface="Amiri" pitchFamily="2" charset="-78"/>
               </a:rPr>
               <a:t>مَرْحَبًا يَا ______ ، كَيْفَ حَالُكِ؟</a:t>
@@ -25850,6 +26001,7 @@
                   <a:srgbClr val="1B3B6F"/>
                 </a:solidFill>
                 <a:latin typeface="Amiri" pitchFamily="2" charset="-78"/>
+                <a:ea typeface="Amiri" pitchFamily="2" charset="-78"/>
                 <a:cs typeface="Amiri" pitchFamily="2" charset="-78"/>
               </a:rPr>
               <a:t>بَدَأْتُ تَبَادُلًا لُغَوِيًّا مَعَ ______ ، وَهِيَ ______ .</a:t>
@@ -26056,6 +26208,7 @@
                   <a:srgbClr val="1B3B6F"/>
                 </a:solidFill>
                 <a:latin typeface="Amiri" pitchFamily="2" charset="-78"/>
+                <a:ea typeface="Amiri" pitchFamily="2" charset="-78"/>
                 <a:cs typeface="Amiri" pitchFamily="2" charset="-78"/>
               </a:rPr>
               <a:t>نَتَوَاصَلُ عَبْرَ ______ ______ فِي الأُسْبُوعِ.</a:t>
@@ -26262,6 +26415,7 @@
                   <a:srgbClr val="1B3B6F"/>
                 </a:solidFill>
                 <a:latin typeface="Amiri" pitchFamily="2" charset="-78"/>
+                <a:ea typeface="Amiri" pitchFamily="2" charset="-78"/>
                 <a:cs typeface="Amiri" pitchFamily="2" charset="-78"/>
               </a:rPr>
               <a:t>هِيَ ______ ، وَأَنَا ______ . التَّبَادُلُ ______ .</a:t>
@@ -26468,6 +26622,7 @@
                   <a:srgbClr val="1B3B6F"/>
                 </a:solidFill>
                 <a:latin typeface="Amiri" pitchFamily="2" charset="-78"/>
+                <a:ea typeface="Amiri" pitchFamily="2" charset="-78"/>
                 <a:cs typeface="Amiri" pitchFamily="2" charset="-78"/>
               </a:rPr>
               <a:t>فِي الصَّيْفِ سَأَ______ . وَأَنْتِ، ______ ؟</a:t>
@@ -26674,6 +26829,7 @@
                   <a:srgbClr val="1B3B6F"/>
                 </a:solidFill>
                 <a:latin typeface="Amiri" pitchFamily="2" charset="-78"/>
+                <a:ea typeface="Amiri" pitchFamily="2" charset="-78"/>
                 <a:cs typeface="Amiri" pitchFamily="2" charset="-78"/>
               </a:rPr>
               <a:t>مَعَ السَّلَامَةِ، ______</a:t>
@@ -26913,13 +27069,9 @@
     <a:fontScheme name="Office">
       <a:majorFont>
         <a:latin typeface="Calibri Light" panose="020F0302020204030204"/>
-        <a:ea typeface=""/>
-        <a:cs typeface=""/>
-        <a:font script="Jpan" typeface="游ゴシック Light"/>
-        <a:font script="Hang" typeface="맑은 고딕"/>
-        <a:font script="Hans" typeface="等线 Light"/>
-        <a:font script="Hant" typeface="新細明體"/>
-        <a:font script="Arab" typeface="Times New Roman"/>
+        <a:ea typeface="Amiri" pitchFamily="2" charset="-78"/>
+        <a:cs typeface="Amiri" pitchFamily="2" charset="-78"/>
+        <a:font script="Arab" typeface="Amiri"/>
         <a:font script="Hebr" typeface="Times New Roman"/>
         <a:font script="Thai" typeface="Angsana New"/>
         <a:font script="Ethi" typeface="Nyala"/>
@@ -26965,13 +27117,9 @@
       </a:majorFont>
       <a:minorFont>
         <a:latin typeface="Calibri" panose="020F0502020204030204"/>
-        <a:ea typeface=""/>
-        <a:cs typeface=""/>
-        <a:font script="Jpan" typeface="游ゴシック"/>
-        <a:font script="Hang" typeface="맑은 고딕"/>
-        <a:font script="Hans" typeface="等线"/>
-        <a:font script="Hant" typeface="新細明體"/>
-        <a:font script="Arab" typeface="Arial"/>
+        <a:ea typeface="Amiri" pitchFamily="2" charset="-78"/>
+        <a:cs typeface="Amiri" pitchFamily="2" charset="-78"/>
+        <a:font script="Arab" typeface="Amiri"/>
         <a:font script="Hebr" typeface="Arial"/>
         <a:font script="Thai" typeface="Cordia New"/>
         <a:font script="Ethi" typeface="Nyala"/>

--- a/Topic_E/Exam_Practice/TE-L02_Writing_Workshop_Multilingual_Life_and_Communication.pptx
+++ b/Topic_E/Exam_Practice/TE-L02_Writing_Workshop_Multilingual_Life_and_Communication.pptx
@@ -3852,7 +3852,7 @@
                 <a:solidFill>
                   <a:srgbClr val="FFFFFF"/>
                 </a:solidFill>
-                <a:latin typeface="Calibri" pitchFamily="34" charset="0"/>
+                <a:latin typeface="Amiri" pitchFamily="2" charset="-78"/>
                 <a:ea typeface="Amiri" pitchFamily="2" charset="-78"/>
                 <a:cs typeface="Amiri" pitchFamily="2" charset="-78"/>
               </a:rPr>
@@ -3918,7 +3918,7 @@
                 <a:solidFill>
                   <a:srgbClr val="FFFFFF"/>
                 </a:solidFill>
-                <a:latin typeface="Calibri" pitchFamily="34" charset="0"/>
+                <a:latin typeface="Amiri" pitchFamily="2" charset="-78"/>
                 <a:ea typeface="Amiri" pitchFamily="2" charset="-78"/>
                 <a:cs typeface="Amiri" pitchFamily="2" charset="-78"/>
               </a:rPr>
@@ -3984,7 +3984,7 @@
                 <a:solidFill>
                   <a:srgbClr val="FFFFFF"/>
                 </a:solidFill>
-                <a:latin typeface="Calibri" pitchFamily="34" charset="0"/>
+                <a:latin typeface="Amiri" pitchFamily="2" charset="-78"/>
                 <a:ea typeface="Amiri" pitchFamily="2" charset="-78"/>
                 <a:cs typeface="Amiri" pitchFamily="2" charset="-78"/>
               </a:rPr>
@@ -4050,7 +4050,7 @@
                 <a:solidFill>
                   <a:srgbClr val="FFFFFF"/>
                 </a:solidFill>
-                <a:latin typeface="Calibri" pitchFamily="34" charset="0"/>
+                <a:latin typeface="Amiri" pitchFamily="2" charset="-78"/>
                 <a:ea typeface="Amiri" pitchFamily="2" charset="-78"/>
                 <a:cs typeface="Amiri" pitchFamily="2" charset="-78"/>
               </a:rPr>
@@ -4848,7 +4848,7 @@
                 <a:solidFill>
                   <a:srgbClr val="FFFFFF"/>
                 </a:solidFill>
-                <a:latin typeface="Calibri" pitchFamily="34" charset="0"/>
+                <a:latin typeface="Amiri" pitchFamily="2" charset="-78"/>
                 <a:ea typeface="Amiri" pitchFamily="2" charset="-78"/>
                 <a:cs typeface="Amiri" pitchFamily="2" charset="-78"/>
               </a:rPr>
@@ -4914,7 +4914,7 @@
                 <a:solidFill>
                   <a:srgbClr val="FFFFFF"/>
                 </a:solidFill>
-                <a:latin typeface="Calibri" pitchFamily="34" charset="0"/>
+                <a:latin typeface="Amiri" pitchFamily="2" charset="-78"/>
                 <a:ea typeface="Amiri" pitchFamily="2" charset="-78"/>
                 <a:cs typeface="Amiri" pitchFamily="2" charset="-78"/>
               </a:rPr>
@@ -4980,7 +4980,7 @@
                 <a:solidFill>
                   <a:srgbClr val="FFFFFF"/>
                 </a:solidFill>
-                <a:latin typeface="Calibri" pitchFamily="34" charset="0"/>
+                <a:latin typeface="Amiri" pitchFamily="2" charset="-78"/>
                 <a:ea typeface="Amiri" pitchFamily="2" charset="-78"/>
                 <a:cs typeface="Amiri" pitchFamily="2" charset="-78"/>
               </a:rPr>
@@ -5046,7 +5046,7 @@
                 <a:solidFill>
                   <a:srgbClr val="FFFFFF"/>
                 </a:solidFill>
-                <a:latin typeface="Calibri" pitchFamily="34" charset="0"/>
+                <a:latin typeface="Amiri" pitchFamily="2" charset="-78"/>
                 <a:ea typeface="Amiri" pitchFamily="2" charset="-78"/>
                 <a:cs typeface="Amiri" pitchFamily="2" charset="-78"/>
               </a:rPr>
@@ -8603,7 +8603,7 @@
                 <a:solidFill>
                   <a:srgbClr val="FFFFFF"/>
                 </a:solidFill>
-                <a:latin typeface="Calibri" pitchFamily="34" charset="0"/>
+                <a:latin typeface="Amiri" pitchFamily="2" charset="-78"/>
                 <a:ea typeface="Amiri" pitchFamily="2" charset="-78"/>
                 <a:cs typeface="Amiri" pitchFamily="2" charset="-78"/>
               </a:rPr>
@@ -8669,7 +8669,7 @@
                 <a:solidFill>
                   <a:srgbClr val="FFFFFF"/>
                 </a:solidFill>
-                <a:latin typeface="Calibri" pitchFamily="34" charset="0"/>
+                <a:latin typeface="Amiri" pitchFamily="2" charset="-78"/>
                 <a:ea typeface="Amiri" pitchFamily="2" charset="-78"/>
                 <a:cs typeface="Amiri" pitchFamily="2" charset="-78"/>
               </a:rPr>
@@ -8735,7 +8735,7 @@
                 <a:solidFill>
                   <a:srgbClr val="FFFFFF"/>
                 </a:solidFill>
-                <a:latin typeface="Calibri" pitchFamily="34" charset="0"/>
+                <a:latin typeface="Amiri" pitchFamily="2" charset="-78"/>
                 <a:ea typeface="Amiri" pitchFamily="2" charset="-78"/>
                 <a:cs typeface="Amiri" pitchFamily="2" charset="-78"/>
               </a:rPr>
@@ -8801,7 +8801,7 @@
                 <a:solidFill>
                   <a:srgbClr val="FFFFFF"/>
                 </a:solidFill>
-                <a:latin typeface="Calibri" pitchFamily="34" charset="0"/>
+                <a:latin typeface="Amiri" pitchFamily="2" charset="-78"/>
                 <a:ea typeface="Amiri" pitchFamily="2" charset="-78"/>
                 <a:cs typeface="Amiri" pitchFamily="2" charset="-78"/>
               </a:rPr>
@@ -9588,7 +9588,7 @@
                 <a:solidFill>
                   <a:srgbClr val="FFFFFF"/>
                 </a:solidFill>
-                <a:latin typeface="Calibri" pitchFamily="34" charset="0"/>
+                <a:latin typeface="Amiri" pitchFamily="2" charset="-78"/>
                 <a:ea typeface="Amiri" pitchFamily="2" charset="-78"/>
                 <a:cs typeface="Amiri" pitchFamily="2" charset="-78"/>
               </a:rPr>
@@ -9654,7 +9654,7 @@
                 <a:solidFill>
                   <a:srgbClr val="FFFFFF"/>
                 </a:solidFill>
-                <a:latin typeface="Calibri" pitchFamily="34" charset="0"/>
+                <a:latin typeface="Amiri" pitchFamily="2" charset="-78"/>
                 <a:ea typeface="Amiri" pitchFamily="2" charset="-78"/>
                 <a:cs typeface="Amiri" pitchFamily="2" charset="-78"/>
               </a:rPr>
@@ -9720,7 +9720,7 @@
                 <a:solidFill>
                   <a:srgbClr val="FFFFFF"/>
                 </a:solidFill>
-                <a:latin typeface="Calibri" pitchFamily="34" charset="0"/>
+                <a:latin typeface="Amiri" pitchFamily="2" charset="-78"/>
                 <a:ea typeface="Amiri" pitchFamily="2" charset="-78"/>
                 <a:cs typeface="Amiri" pitchFamily="2" charset="-78"/>
               </a:rPr>
@@ -9786,7 +9786,7 @@
                 <a:solidFill>
                   <a:srgbClr val="FFFFFF"/>
                 </a:solidFill>
-                <a:latin typeface="Calibri" pitchFamily="34" charset="0"/>
+                <a:latin typeface="Amiri" pitchFamily="2" charset="-78"/>
                 <a:ea typeface="Amiri" pitchFamily="2" charset="-78"/>
                 <a:cs typeface="Amiri" pitchFamily="2" charset="-78"/>
               </a:rPr>
@@ -10573,7 +10573,7 @@
                 <a:solidFill>
                   <a:srgbClr val="FFFFFF"/>
                 </a:solidFill>
-                <a:latin typeface="Calibri" pitchFamily="34" charset="0"/>
+                <a:latin typeface="Amiri" pitchFamily="2" charset="-78"/>
                 <a:ea typeface="Amiri" pitchFamily="2" charset="-78"/>
                 <a:cs typeface="Amiri" pitchFamily="2" charset="-78"/>
               </a:rPr>
@@ -10639,7 +10639,7 @@
                 <a:solidFill>
                   <a:srgbClr val="FFFFFF"/>
                 </a:solidFill>
-                <a:latin typeface="Calibri" pitchFamily="34" charset="0"/>
+                <a:latin typeface="Amiri" pitchFamily="2" charset="-78"/>
                 <a:ea typeface="Amiri" pitchFamily="2" charset="-78"/>
                 <a:cs typeface="Amiri" pitchFamily="2" charset="-78"/>
               </a:rPr>
@@ -10705,7 +10705,7 @@
                 <a:solidFill>
                   <a:srgbClr val="FFFFFF"/>
                 </a:solidFill>
-                <a:latin typeface="Calibri" pitchFamily="34" charset="0"/>
+                <a:latin typeface="Amiri" pitchFamily="2" charset="-78"/>
                 <a:ea typeface="Amiri" pitchFamily="2" charset="-78"/>
                 <a:cs typeface="Amiri" pitchFamily="2" charset="-78"/>
               </a:rPr>
@@ -10771,7 +10771,7 @@
                 <a:solidFill>
                   <a:srgbClr val="FFFFFF"/>
                 </a:solidFill>
-                <a:latin typeface="Calibri" pitchFamily="34" charset="0"/>
+                <a:latin typeface="Amiri" pitchFamily="2" charset="-78"/>
                 <a:ea typeface="Amiri" pitchFamily="2" charset="-78"/>
                 <a:cs typeface="Amiri" pitchFamily="2" charset="-78"/>
               </a:rPr>
